--- a/public/fun/pack/pptx/familypro/가족소개프리미엄_24_나혼자·1인가구_코랄샌드.pptx
+++ b/public/fun/pack/pptx/familypro/가족소개프리미엄_24_나혼자·1인가구_코랄샌드.pptx
@@ -113,12 +113,12 @@
   <p:extLst>
     <p:ext uri="{521415D9-36F7-43E2-AB2F-B90AF26B5E84}">
       <p14:sectionLst xmlns:p14="http://schemas.microsoft.com/office/powerpoint/2010/main">
-        <p14:section name="시작" id="{A6437322-8A6B-496A-A38B-27C7CE67021F}">
+        <p14:section name="시작" id="{0486CCC4-9BCD-43F2-8944-D909EDF8A058}">
           <p14:sldIdLst>
             <p14:sldId id="256"/>
           </p14:sldIdLst>
         </p14:section>
-        <p14:section name="본문" id="{16DF5497-4F25-43DB-933B-09C9E9C7F663}">
+        <p14:section name="본문" id="{2102F05C-C5DD-4EED-B396-00EEB886A036}">
           <p14:sldIdLst>
             <p14:sldId id="257"/>
             <p14:sldId id="258"/>
@@ -127,7 +127,7 @@
             <p14:sldId id="261"/>
           </p14:sldIdLst>
         </p14:section>
-        <p14:section name="마무리" id="{D379BCC1-CA30-445B-982B-2294F767AC12}">
+        <p14:section name="마무리" id="{6932ACC7-0779-423C-9181-BCB1282A5377}">
           <p14:sldIdLst>
             <p14:sldId id="262"/>
           </p14:sldIdLst>
@@ -2995,7 +2995,7 @@
             </a:lvl1pPr>
           </a:lstStyle>
           <a:p>
-            <a:fld id="{09F11A00-3F72-45FD-BD71-0CD8F71AA1FB}" type="slidenum">
+            <a:fld id="{9F342FCA-2E5F-4300-9E77-8309C0C14D0D}" type="slidenum">
               <a:rPr lang="en-US"/>
               <a:t>‹#›</a:t>
             </a:fld>
@@ -5197,7 +5197,7 @@
             </a:lvl1pPr>
           </a:lstStyle>
           <a:p>
-            <a:fld id="{DAB1B9CB-DF74-475E-B673-053A9E4DCE9B}" type="slidenum">
+            <a:fld id="{3501D613-E064-46F2-A067-87FA283C6FB1}" type="slidenum">
               <a:rPr lang="en-US"/>
               <a:t>‹#›</a:t>
             </a:fld>
@@ -5946,7 +5946,7 @@
             </a:lvl1pPr>
           </a:lstStyle>
           <a:p>
-            <a:fld id="{65C0B082-6C89-4597-A80C-4D6DC860FF04}" type="slidenum">
+            <a:fld id="{E15A4DF5-54C6-482F-907E-46D642A1B4D0}" type="slidenum">
               <a:rPr lang="en-US"/>
               <a:t>‹#›</a:t>
             </a:fld>
@@ -6831,7 +6831,7 @@
           <a:p>
             <a:r>
               <a:rPr lang="ko-KR"/>
-              <a:t>나 혼자 · 1인 가구 · 0000. 00. 00</a:t>
+              <a:t>나 혼자 · 1인 가구 · 날짜 입력</a:t>
             </a:r>
           </a:p>
         </p:txBody>
@@ -7163,7 +7163,7 @@
           <a:bodyPr/>
           <a:lstStyle/>
           <a:p>
-            <a:fld id="{28CC6567-D015-4265-B62D-0E78804C31C0}" type="slidenum">
+            <a:fld id="{A7F31778-1FE9-4A5A-8CE5-1A32818ED357}" type="slidenum">
               <a:rPr lang="en-US"/>
               <a:t>‹#›</a:t>
             </a:fld>
@@ -7807,7 +7807,7 @@
           <a:bodyPr/>
           <a:lstStyle/>
           <a:p>
-            <a:fld id="{337AB63D-9606-4540-9D07-810E0EE76B45}" type="slidenum">
+            <a:fld id="{4BE6EDCA-C816-47E8-B086-DD34F6A5EF8E}" type="slidenum">
               <a:rPr lang="en-US"/>
               <a:t>‹#›</a:t>
             </a:fld>
@@ -8804,7 +8804,7 @@
           <a:bodyPr/>
           <a:lstStyle/>
           <a:p>
-            <a:fld id="{1D7AD1A4-064E-45EA-B60A-06A7A1A4121F}" type="slidenum">
+            <a:fld id="{A524A322-D987-4357-A77E-CA5E973B035F}" type="slidenum">
               <a:rPr lang="en-US"/>
               <a:t>‹#›</a:t>
             </a:fld>
@@ -10138,7 +10138,7 @@
           <a:bodyPr/>
           <a:lstStyle/>
           <a:p>
-            <a:fld id="{D5C8DEE5-AC6F-4D79-A2C2-AFD71139E08C}" type="slidenum">
+            <a:fld id="{248DDB7D-759E-42A6-B094-2827658B3F62}" type="slidenum">
               <a:rPr lang="en-US"/>
               <a:t>‹#›</a:t>
             </a:fld>
@@ -10248,7 +10248,7 @@
           <a:bodyPr/>
           <a:lstStyle/>
           <a:p>
-            <a:fld id="{5ECDF8D9-11C8-481A-ABC2-EF73A964EC42}" type="slidenum">
+            <a:fld id="{31586186-D042-4992-98E1-8E1359296E9F}" type="slidenum">
               <a:rPr lang="en-US"/>
               <a:t>‹#›</a:t>
             </a:fld>
